--- a/DEV-1-16/for_students/DAY-1/ppt/dev1_04.pptx
+++ b/DEV-1-16/for_students/DAY-1/ppt/dev1_04.pptx
@@ -272,7 +272,7 @@
           <a:p>
             <a:fld id="{EF790F8C-5FB9-4EFE-BCC7-F735A3026FD8}" type="datetimeFigureOut">
               <a:rPr lang="ru-RU" smtClean="0"/>
-              <a:t>20.09.2024</a:t>
+              <a:t>05.12.2025</a:t>
             </a:fld>
             <a:endParaRPr lang="ru-RU"/>
           </a:p>
@@ -470,7 +470,7 @@
           <a:p>
             <a:fld id="{EF790F8C-5FB9-4EFE-BCC7-F735A3026FD8}" type="datetimeFigureOut">
               <a:rPr lang="ru-RU" smtClean="0"/>
-              <a:t>20.09.2024</a:t>
+              <a:t>05.12.2025</a:t>
             </a:fld>
             <a:endParaRPr lang="ru-RU"/>
           </a:p>
@@ -678,7 +678,7 @@
           <a:p>
             <a:fld id="{EF790F8C-5FB9-4EFE-BCC7-F735A3026FD8}" type="datetimeFigureOut">
               <a:rPr lang="ru-RU" smtClean="0"/>
-              <a:t>20.09.2024</a:t>
+              <a:t>05.12.2025</a:t>
             </a:fld>
             <a:endParaRPr lang="ru-RU"/>
           </a:p>
@@ -1690,7 +1690,7 @@
           <a:p>
             <a:fld id="{EF790F8C-5FB9-4EFE-BCC7-F735A3026FD8}" type="datetimeFigureOut">
               <a:rPr lang="ru-RU" smtClean="0"/>
-              <a:t>20.09.2024</a:t>
+              <a:t>05.12.2025</a:t>
             </a:fld>
             <a:endParaRPr lang="ru-RU"/>
           </a:p>
@@ -2801,7 +2801,7 @@
           <a:p>
             <a:fld id="{EF790F8C-5FB9-4EFE-BCC7-F735A3026FD8}" type="datetimeFigureOut">
               <a:rPr lang="ru-RU" smtClean="0"/>
-              <a:t>20.09.2024</a:t>
+              <a:t>05.12.2025</a:t>
             </a:fld>
             <a:endParaRPr lang="ru-RU"/>
           </a:p>
@@ -3076,7 +3076,7 @@
           <a:p>
             <a:fld id="{EF790F8C-5FB9-4EFE-BCC7-F735A3026FD8}" type="datetimeFigureOut">
               <a:rPr lang="ru-RU" smtClean="0"/>
-              <a:t>20.09.2024</a:t>
+              <a:t>05.12.2025</a:t>
             </a:fld>
             <a:endParaRPr lang="ru-RU"/>
           </a:p>
@@ -3341,7 +3341,7 @@
           <a:p>
             <a:fld id="{EF790F8C-5FB9-4EFE-BCC7-F735A3026FD8}" type="datetimeFigureOut">
               <a:rPr lang="ru-RU" smtClean="0"/>
-              <a:t>20.09.2024</a:t>
+              <a:t>05.12.2025</a:t>
             </a:fld>
             <a:endParaRPr lang="ru-RU"/>
           </a:p>
@@ -3753,7 +3753,7 @@
           <a:p>
             <a:fld id="{EF790F8C-5FB9-4EFE-BCC7-F735A3026FD8}" type="datetimeFigureOut">
               <a:rPr lang="ru-RU" smtClean="0"/>
-              <a:t>20.09.2024</a:t>
+              <a:t>05.12.2025</a:t>
             </a:fld>
             <a:endParaRPr lang="ru-RU"/>
           </a:p>
@@ -3894,7 +3894,7 @@
           <a:p>
             <a:fld id="{EF790F8C-5FB9-4EFE-BCC7-F735A3026FD8}" type="datetimeFigureOut">
               <a:rPr lang="ru-RU" smtClean="0"/>
-              <a:t>20.09.2024</a:t>
+              <a:t>05.12.2025</a:t>
             </a:fld>
             <a:endParaRPr lang="ru-RU"/>
           </a:p>
@@ -4007,7 +4007,7 @@
           <a:p>
             <a:fld id="{EF790F8C-5FB9-4EFE-BCC7-F735A3026FD8}" type="datetimeFigureOut">
               <a:rPr lang="ru-RU" smtClean="0"/>
-              <a:t>20.09.2024</a:t>
+              <a:t>05.12.2025</a:t>
             </a:fld>
             <a:endParaRPr lang="ru-RU"/>
           </a:p>
@@ -4318,7 +4318,7 @@
           <a:p>
             <a:fld id="{EF790F8C-5FB9-4EFE-BCC7-F735A3026FD8}" type="datetimeFigureOut">
               <a:rPr lang="ru-RU" smtClean="0"/>
-              <a:t>20.09.2024</a:t>
+              <a:t>05.12.2025</a:t>
             </a:fld>
             <a:endParaRPr lang="ru-RU"/>
           </a:p>
@@ -4606,7 +4606,7 @@
           <a:p>
             <a:fld id="{EF790F8C-5FB9-4EFE-BCC7-F735A3026FD8}" type="datetimeFigureOut">
               <a:rPr lang="ru-RU" smtClean="0"/>
-              <a:t>20.09.2024</a:t>
+              <a:t>05.12.2025</a:t>
             </a:fld>
             <a:endParaRPr lang="ru-RU"/>
           </a:p>
@@ -4847,7 +4847,7 @@
           <a:p>
             <a:fld id="{EF790F8C-5FB9-4EFE-BCC7-F735A3026FD8}" type="datetimeFigureOut">
               <a:rPr lang="ru-RU" smtClean="0"/>
-              <a:t>20.09.2024</a:t>
+              <a:t>05.12.2025</a:t>
             </a:fld>
             <a:endParaRPr lang="ru-RU"/>
           </a:p>
@@ -6009,7 +6009,7 @@
 </file>
 
 <file path=ppt/slides/slide1.xml><?xml version="1.0" encoding="utf-8"?>
-<p:sld xmlns:a="http://schemas.openxmlformats.org/drawingml/2006/main" xmlns:r="http://schemas.openxmlformats.org/officeDocument/2006/relationships" xmlns:p="http://schemas.openxmlformats.org/presentationml/2006/main">
+<p:sld xmlns:a="http://schemas.openxmlformats.org/drawingml/2006/main" xmlns:r="http://schemas.openxmlformats.org/officeDocument/2006/relationships" xmlns:p="http://schemas.openxmlformats.org/presentationml/2006/main" showMasterSp="0">
   <p:cSld>
     <p:spTree>
       <p:nvGrpSpPr>
